--- a/companies/meridian-actuarial/Engagements/Miller, Cook and Snyder/2017.10.16 - Briefing Deck - Miller, Cook and Snyder.pptx
+++ b/companies/meridian-actuarial/Engagements/Miller, Cook and Snyder/2017.10.16 - Briefing Deck - Miller, Cook and Snyder.pptx
@@ -3114,7 +3114,7 @@
                   <a:srgbClr val="4A2E2A"/>
                 </a:solidFill>
               </a:rPr>
-              <a:t>Reserve Adequacy Review: A Briefing on the Work Under Way</a:t>
+              <a:t>Reserve Adequacy Review for Miller, Cook and Snyder</a:t>
             </a:r>
           </a:p>
         </p:txBody>
@@ -3141,7 +3141,7 @@
           <a:p>
             <a:pPr/>
             <a:r>
-              <a:t>Prepared for Miller, Cook and Snyder by Meridian Actuarial Advisors. The engagement opened on August 28, 2017, and this short briefing sets out what we are doing, who is doing it, and where the work stands now that it is under way.</a:t>
+              <a:t>A briefing for Michelle Hudson, Director of Operations, prepared by Megan Dudley with Jennifer Vasquez and David Sherman. It covers where the work stands, what the data have shown us so far, and what we will be asking of your team over the coming weeks.</a:t>
             </a:r>
           </a:p>
         </p:txBody>
@@ -3185,7 +3185,7 @@
                   <a:srgbClr val="4A2E2A"/>
                 </a:solidFill>
               </a:rPr>
-              <a:t>The Question We Are Here to Answer</a:t>
+              <a:t>Where the work stands</a:t>
             </a:r>
           </a:p>
         </p:txBody>
@@ -3205,21 +3205,9 @@
           <a:bodyPr/>
           <a:lstStyle/>
           <a:p>
-            <a:pPr lvl="1"/>
-            <a:r>
-              <a:t>Whether the reserves Miller, Cook and Snyder carries are adequate to meet the obligations they are meant to fund.</a:t>
-            </a:r>
-          </a:p>
-          <a:p>
-            <a:pPr lvl="1"/>
-            <a:r>
-              <a:t>An independent view, formed from your own data as reconciled, not carried in from another engagement.</a:t>
-            </a:r>
-          </a:p>
-          <a:p>
-            <a:pPr lvl="1"/>
-            <a:r>
-              <a:t>A written opinion that keeps what the data show, what we assume, and what we conclude as three separate matters.</a:t>
+            <a:pPr/>
+            <a:r>
+              <a:t>We have been at work since August 28, 2017, and nearly all of that time has gone into the data, as the engagement letter said it would. Using the replacement extract your team ran for us, the reserve detail now agrees with your year-end figures within rounding, and our data log records why the first file was set aside.</a:t>
             </a:r>
           </a:p>
         </p:txBody>
@@ -3263,7 +3251,7 @@
                   <a:srgbClr val="4A2E2A"/>
                 </a:solidFill>
               </a:rPr>
-              <a:t>What the Review Covers</a:t>
+              <a:t>What the records are telling us</a:t>
             </a:r>
           </a:p>
         </p:txBody>
@@ -3283,27 +3271,9 @@
           <a:bodyPr/>
           <a:lstStyle/>
           <a:p>
-            <a:pPr lvl="1"/>
-            <a:r>
-              <a:t>Reconciling the reserve data you provide against your own financial records, so the figures we test are the figures you carry.</a:t>
-            </a:r>
-          </a:p>
-          <a:p>
-            <a:pPr lvl="1"/>
-            <a:r>
-              <a:t>Reviewing the assumptions behind the current reserves, keeping those that regulation fixes apart from those that rest on judgment.</a:t>
-            </a:r>
-          </a:p>
-          <a:p>
-            <a:pPr lvl="1"/>
-            <a:r>
-              <a:t>Building an independent estimate of the required reserves and comparing it against the carried figures, with any difference attributed to its sources.</a:t>
-            </a:r>
-          </a:p>
-          <a:p>
-            <a:pPr lvl="1"/>
-            <a:r>
-              <a:t>Outside the work: auditing your statements, setting your reserves for you, or opining on your rates.</a:t>
+            <a:pPr/>
+            <a:r>
+              <a:t>David Sherman has moved on from totals to the individual fields the model draws on, and most records are clean. A small group carries an incurred date later than the valuation date, which cannot be right for a reserve held at that date. Until we hear otherwise we are using each claim's reported date in its place, and we have written that down as our assumption, not as something the file told us.</a:t>
             </a:r>
           </a:p>
         </p:txBody>
@@ -3347,7 +3317,7 @@
                   <a:srgbClr val="4A2E2A"/>
                 </a:solidFill>
               </a:rPr>
-              <a:t>The People on Both Sides</a:t>
+              <a:t>Your methods and assumptions</a:t>
             </a:r>
           </a:p>
         </p:txBody>
@@ -3367,27 +3337,9 @@
           <a:bodyPr/>
           <a:lstStyle/>
           <a:p>
-            <a:pPr lvl="1"/>
-            <a:r>
-              <a:t>Jennifer Vasquez, Consulting Actuary, owns the relationship and the judgment calls on scope.</a:t>
-            </a:r>
-          </a:p>
-          <a:p>
-            <a:pPr lvl="1"/>
-            <a:r>
-              <a:t>David Sherman, Senior Analyst, builds the valuation workbook and reconciles the data as it arrives.</a:t>
-            </a:r>
-          </a:p>
-          <a:p>
-            <a:pPr lvl="1"/>
-            <a:r>
-              <a:t>Megan Dudley, Actuarial Associate, keeps the exhibits, the data checks, and the running request log.</a:t>
-            </a:r>
-          </a:p>
-          <a:p>
-            <a:pPr lvl="1"/>
-            <a:r>
-              <a:t>Michelle Hudson, your Director of Operations, is our single point of contact for the data.</a:t>
+            <a:pPr/>
+            <a:r>
+              <a:t>The documentation of the methods and assumptions behind the current reserves has arrived, and Jennifer Vasquez is working through it. She is sorting the assumptions into those that are prescribed and those that rest on judgment, and looking closely at the one change it records during the year. We have formed no view on any of them yet, and nothing in this briefing should be read as a finding.</a:t>
             </a:r>
           </a:p>
         </p:txBody>
@@ -3431,7 +3383,7 @@
                   <a:srgbClr val="4A2E2A"/>
                 </a:solidFill>
               </a:rPr>
-              <a:t>Where the Work Stands Today</a:t>
+              <a:t>Who is doing what</a:t>
             </a:r>
           </a:p>
         </p:txBody>
@@ -3451,27 +3403,9 @@
           <a:bodyPr/>
           <a:lstStyle/>
           <a:p>
-            <a:pPr lvl="1"/>
-            <a:r>
-              <a:t>We are in the early weeks, and the emphasis now is squarely on the data rather than on conclusions.</a:t>
-            </a:r>
-          </a:p>
-          <a:p>
-            <a:pPr lvl="1"/>
-            <a:r>
-              <a:t>The reserve detail has begun to arrive and the reconciliation against your year-end records is under way.</a:t>
-            </a:r>
-          </a:p>
-          <a:p>
-            <a:pPr lvl="1"/>
-            <a:r>
-              <a:t>One grouping question on the summary totals is open and being run to ground; we expect it to close without consequence.</a:t>
-            </a:r>
-          </a:p>
-          <a:p>
-            <a:pPr lvl="1"/>
-            <a:r>
-              <a:t>We are not offering findings yet, because an opinion this early would run ahead of what the work supports.</a:t>
+            <a:pPr/>
+            <a:r>
+              <a:t>Jennifer Vasquez leads the review and remains your first call on scope, schedule, and questions of judgment. David Sherman builds the reserve model and carries the reconciliation. Megan Dudley keeps the request log and stays your contact for anything to do with files, so that your staff hear about data from one person on our side.</a:t>
             </a:r>
           </a:p>
         </p:txBody>
@@ -3515,7 +3449,7 @@
                   <a:srgbClr val="4A2E2A"/>
                 </a:solidFill>
               </a:rPr>
-              <a:t>What Comes Next</a:t>
+              <a:t>From here</a:t>
             </a:r>
           </a:p>
         </p:txBody>
@@ -3537,7 +3471,7 @@
           <a:p>
             <a:pPr/>
             <a:r>
-              <a:t>From here we finish the reconciliation, then move into the assumption review and the independent estimate, and we will send a short status note as each piece lands so you always know where things stand. The single most useful thing from your side is the assumption documentation as it stood at the valuation date; our one clear next step is to get that itemized request to you this week and confirm each item as it comes back.</a:t>
+              <a:t>Once the incurred dates are settled, David Sherman will reproduce your carried reserves with your own methods, which is the step before we build an estimate of our own. We would like to hold a working session with you in November to go through the data position and the assumption questions together. The one thing we need before then is a word from your team on how those incurred dates came to be entered.</a:t>
             </a:r>
           </a:p>
         </p:txBody>
